--- a/Bozza 1.pptx
+++ b/Bozza 1.pptx
@@ -118,6 +118,9 @@
         </p14:section>
       </p14:sectionLst>
     </p:ext>
+    <p:ext uri="{EFAFB233-063F-42B5-8137-9DF3F51BA10A}">
+      <p15:sldGuideLst xmlns:p15="http://schemas.microsoft.com/office/powerpoint/2012/main"/>
+    </p:ext>
   </p:extLst>
 </p:presentation>
 </file>
@@ -269,7 +272,7 @@
           <a:p>
             <a:fld id="{52E6D515-AA7F-4F0D-B6BE-7F64920EA368}" type="datetimeFigureOut">
               <a:rPr lang="it-IT" smtClean="0"/>
-              <a:t>07/08/2022</a:t>
+              <a:t>11/06/2026</a:t>
             </a:fld>
             <a:endParaRPr lang="it-IT"/>
           </a:p>
@@ -467,7 +470,7 @@
           <a:p>
             <a:fld id="{52E6D515-AA7F-4F0D-B6BE-7F64920EA368}" type="datetimeFigureOut">
               <a:rPr lang="it-IT" smtClean="0"/>
-              <a:t>07/08/2022</a:t>
+              <a:t>11/06/2026</a:t>
             </a:fld>
             <a:endParaRPr lang="it-IT"/>
           </a:p>
@@ -675,7 +678,7 @@
           <a:p>
             <a:fld id="{52E6D515-AA7F-4F0D-B6BE-7F64920EA368}" type="datetimeFigureOut">
               <a:rPr lang="it-IT" smtClean="0"/>
-              <a:t>07/08/2022</a:t>
+              <a:t>11/06/2026</a:t>
             </a:fld>
             <a:endParaRPr lang="it-IT"/>
           </a:p>
@@ -873,7 +876,7 @@
           <a:p>
             <a:fld id="{52E6D515-AA7F-4F0D-B6BE-7F64920EA368}" type="datetimeFigureOut">
               <a:rPr lang="it-IT" smtClean="0"/>
-              <a:t>07/08/2022</a:t>
+              <a:t>11/06/2026</a:t>
             </a:fld>
             <a:endParaRPr lang="it-IT"/>
           </a:p>
@@ -1148,7 +1151,7 @@
           <a:p>
             <a:fld id="{52E6D515-AA7F-4F0D-B6BE-7F64920EA368}" type="datetimeFigureOut">
               <a:rPr lang="it-IT" smtClean="0"/>
-              <a:t>07/08/2022</a:t>
+              <a:t>11/06/2026</a:t>
             </a:fld>
             <a:endParaRPr lang="it-IT"/>
           </a:p>
@@ -1413,7 +1416,7 @@
           <a:p>
             <a:fld id="{52E6D515-AA7F-4F0D-B6BE-7F64920EA368}" type="datetimeFigureOut">
               <a:rPr lang="it-IT" smtClean="0"/>
-              <a:t>07/08/2022</a:t>
+              <a:t>11/06/2026</a:t>
             </a:fld>
             <a:endParaRPr lang="it-IT"/>
           </a:p>
@@ -1825,7 +1828,7 @@
           <a:p>
             <a:fld id="{52E6D515-AA7F-4F0D-B6BE-7F64920EA368}" type="datetimeFigureOut">
               <a:rPr lang="it-IT" smtClean="0"/>
-              <a:t>07/08/2022</a:t>
+              <a:t>11/06/2026</a:t>
             </a:fld>
             <a:endParaRPr lang="it-IT"/>
           </a:p>
@@ -1966,7 +1969,7 @@
           <a:p>
             <a:fld id="{52E6D515-AA7F-4F0D-B6BE-7F64920EA368}" type="datetimeFigureOut">
               <a:rPr lang="it-IT" smtClean="0"/>
-              <a:t>07/08/2022</a:t>
+              <a:t>11/06/2026</a:t>
             </a:fld>
             <a:endParaRPr lang="it-IT"/>
           </a:p>
@@ -2079,7 +2082,7 @@
           <a:p>
             <a:fld id="{52E6D515-AA7F-4F0D-B6BE-7F64920EA368}" type="datetimeFigureOut">
               <a:rPr lang="it-IT" smtClean="0"/>
-              <a:t>07/08/2022</a:t>
+              <a:t>11/06/2026</a:t>
             </a:fld>
             <a:endParaRPr lang="it-IT"/>
           </a:p>
@@ -2390,7 +2393,7 @@
           <a:p>
             <a:fld id="{52E6D515-AA7F-4F0D-B6BE-7F64920EA368}" type="datetimeFigureOut">
               <a:rPr lang="it-IT" smtClean="0"/>
-              <a:t>07/08/2022</a:t>
+              <a:t>11/06/2026</a:t>
             </a:fld>
             <a:endParaRPr lang="it-IT"/>
           </a:p>
@@ -2678,7 +2681,7 @@
           <a:p>
             <a:fld id="{52E6D515-AA7F-4F0D-B6BE-7F64920EA368}" type="datetimeFigureOut">
               <a:rPr lang="it-IT" smtClean="0"/>
-              <a:t>07/08/2022</a:t>
+              <a:t>11/06/2026</a:t>
             </a:fld>
             <a:endParaRPr lang="it-IT"/>
           </a:p>
@@ -2919,7 +2922,7 @@
           <a:p>
             <a:fld id="{52E6D515-AA7F-4F0D-B6BE-7F64920EA368}" type="datetimeFigureOut">
               <a:rPr lang="it-IT" smtClean="0"/>
-              <a:t>07/08/2022</a:t>
+              <a:t>11/06/2026</a:t>
             </a:fld>
             <a:endParaRPr lang="it-IT"/>
           </a:p>
@@ -3548,6 +3551,101 @@
           </a:p>
         </p:txBody>
       </p:sp>
+      <mc:AlternateContent xmlns:mc="http://schemas.openxmlformats.org/markup-compatibility/2006">
+        <mc:Choice xmlns:a14="http://schemas.microsoft.com/office/drawing/2010/main" Requires="a14">
+          <p:sp>
+            <p:nvSpPr>
+              <p:cNvPr id="2" name="CasellaDiTesto 1">
+                <a:extLst>
+                  <a:ext uri="{FF2B5EF4-FFF2-40B4-BE49-F238E27FC236}">
+                    <a16:creationId xmlns:a16="http://schemas.microsoft.com/office/drawing/2014/main" id="{3572FF7C-0D97-A55A-8A80-9D9D9EC3BF26}"/>
+                  </a:ext>
+                </a:extLst>
+              </p:cNvPr>
+              <p:cNvSpPr txBox="1"/>
+              <p:nvPr/>
+            </p:nvSpPr>
+            <p:spPr>
+              <a:xfrm>
+                <a:off x="5637276" y="2976372"/>
+                <a:ext cx="1384161" cy="276999"/>
+              </a:xfrm>
+              <a:prstGeom prst="rect">
+                <a:avLst/>
+              </a:prstGeom>
+              <a:noFill/>
+            </p:spPr>
+            <p:txBody>
+              <a:bodyPr wrap="none" lIns="0" tIns="0" rIns="0" bIns="0" rtlCol="0">
+                <a:spAutoFit/>
+              </a:bodyPr>
+              <a:lstStyle/>
+              <a:p>
+                <a14:m>
+                  <m:oMathPara xmlns:m="http://schemas.openxmlformats.org/officeDocument/2006/math">
+                    <m:oMathParaPr>
+                      <m:jc m:val="centerGroup"/>
+                    </m:oMathParaPr>
+                    <m:oMath xmlns:m="http://schemas.openxmlformats.org/officeDocument/2006/math">
+                      <m:r>
+                        <a:rPr lang="en-US" b="0" i="1" smtClean="0">
+                          <a:latin typeface="Cambria Math" panose="02040503050406030204" pitchFamily="18" charset="0"/>
+                        </a:rPr>
+                        <m:t>h𝑓𝑔h𝑔𝑚𝑢𝑔𝑚</m:t>
+                      </m:r>
+                    </m:oMath>
+                  </m:oMathPara>
+                </a14:m>
+                <a:endParaRPr lang="en-US" dirty="0"/>
+              </a:p>
+            </p:txBody>
+          </p:sp>
+        </mc:Choice>
+        <mc:Fallback>
+          <p:sp>
+            <p:nvSpPr>
+              <p:cNvPr id="2" name="CasellaDiTesto 1">
+                <a:extLst>
+                  <a:ext uri="{FF2B5EF4-FFF2-40B4-BE49-F238E27FC236}">
+                    <a16:creationId xmlns:a16="http://schemas.microsoft.com/office/drawing/2014/main" id="{3572FF7C-0D97-A55A-8A80-9D9D9EC3BF26}"/>
+                  </a:ext>
+                </a:extLst>
+              </p:cNvPr>
+              <p:cNvSpPr txBox="1">
+                <a:spLocks noRot="1" noChangeAspect="1" noMove="1" noResize="1" noEditPoints="1" noAdjustHandles="1" noChangeArrowheads="1" noChangeShapeType="1" noTextEdit="1"/>
+              </p:cNvSpPr>
+              <p:nvPr/>
+            </p:nvSpPr>
+            <p:spPr>
+              <a:xfrm>
+                <a:off x="5637276" y="2976372"/>
+                <a:ext cx="1384161" cy="276999"/>
+              </a:xfrm>
+              <a:prstGeom prst="rect">
+                <a:avLst/>
+              </a:prstGeom>
+              <a:blipFill>
+                <a:blip r:embed="rId2"/>
+                <a:stretch>
+                  <a:fillRect l="-5727" t="-2174" r="-5727" b="-32609"/>
+                </a:stretch>
+              </a:blipFill>
+            </p:spPr>
+            <p:txBody>
+              <a:bodyPr/>
+              <a:lstStyle/>
+              <a:p>
+                <a:r>
+                  <a:rPr lang="en-US">
+                    <a:noFill/>
+                  </a:rPr>
+                  <a:t> </a:t>
+                </a:r>
+              </a:p>
+            </p:txBody>
+          </p:sp>
+        </mc:Fallback>
+      </mc:AlternateContent>
     </p:spTree>
     <p:extLst>
       <p:ext uri="{BB962C8B-B14F-4D97-AF65-F5344CB8AC3E}">
